--- a/tools/poi-dsl-exporter/showcase-out/ppt-quarterly-transformation-showcase.pptx
+++ b/tools/poi-dsl-exporter/showcase-out/ppt-quarterly-transformation-showcase.pptx
@@ -4736,19 +4736,43 @@
       </p:sp>
       <p:sp>
         <p:nvSpPr>
-          <p:cNvPr name="TextBox 3" id="3"/>
-          <p:cNvSpPr txBox="true"/>
+          <p:cNvPr name="AutoShape 3" id="3"/>
+          <p:cNvSpPr/>
           <p:nvPr/>
         </p:nvSpPr>
         <p:spPr>
           <a:xfrm>
-            <a:off x="304800" y="152400"/>
-            <a:ext cx="10922000" cy="508000"/>
+            <a:off x="304800" y="495300"/>
+            <a:ext cx="11582400" cy="12700"/>
           </a:xfrm>
           <a:prstGeom prst="rect">
             <a:avLst/>
           </a:prstGeom>
           <a:solidFill>
+            <a:srgbClr val="1D4ED8"/>
+          </a:solidFill>
+          <a:ln>
+            <a:solidFill>
+              <a:srgbClr val="1D4ED8"/>
+            </a:solidFill>
+          </a:ln>
+        </p:spPr>
+      </p:sp>
+      <p:sp>
+        <p:nvSpPr>
+          <p:cNvPr name="TextBox 4" id="4"/>
+          <p:cNvSpPr txBox="true"/>
+          <p:nvPr/>
+        </p:nvSpPr>
+        <p:spPr>
+          <a:xfrm>
+            <a:off x="304800" y="152400"/>
+            <a:ext cx="11582400" cy="330200"/>
+          </a:xfrm>
+          <a:prstGeom prst="rect">
+            <a:avLst/>
+          </a:prstGeom>
+          <a:solidFill>
             <a:srgbClr val="FFFFFF">
               <a:alpha val="0"/>
             </a:srgbClr>
@@ -4770,20 +4794,100 @@
           <a:p>
             <a:pPr algn="l"/>
             <a:r>
-              <a:rPr lang="en-US" sz="1400" b="true">
+              <a:rPr lang="en-US" sz="1285" b="true">
                 <a:solidFill>
                   <a:srgbClr val="6B7280"/>
                 </a:solidFill>
                 <a:ea typeface="Source Sans 3"/>
               </a:rPr>
-              <a:t>封面</a:t>
-            </a:r>
-          </a:p>
-        </p:txBody>
-      </p:sp>
-      <p:sp>
-        <p:nvSpPr>
-          <p:cNvPr name="TextBox 4" id="4"/>
+              <a:t>数字化转型季度复盘（管理层汇报） · 封面</a:t>
+            </a:r>
+          </a:p>
+        </p:txBody>
+      </p:sp>
+      <p:sp>
+        <p:nvSpPr>
+          <p:cNvPr name="AutoShape 5" id="5"/>
+          <p:cNvSpPr/>
+          <p:nvPr/>
+        </p:nvSpPr>
+        <p:spPr>
+          <a:xfrm>
+            <a:off x="304800" y="6426200"/>
+            <a:ext cx="11582400" cy="12700"/>
+          </a:xfrm>
+          <a:prstGeom prst="rect">
+            <a:avLst/>
+          </a:prstGeom>
+          <a:solidFill>
+            <a:srgbClr val="1D4ED8"/>
+          </a:solidFill>
+          <a:ln>
+            <a:solidFill>
+              <a:srgbClr val="1D4ED8"/>
+            </a:solidFill>
+          </a:ln>
+        </p:spPr>
+      </p:sp>
+      <p:sp>
+        <p:nvSpPr>
+          <p:cNvPr name="TextBox 6" id="6"/>
+          <p:cNvSpPr txBox="true"/>
+          <p:nvPr/>
+        </p:nvSpPr>
+        <p:spPr>
+          <a:xfrm>
+            <a:off x="304800" y="6451600"/>
+            <a:ext cx="11582400" cy="279400"/>
+          </a:xfrm>
+          <a:prstGeom prst="rect">
+            <a:avLst/>
+          </a:prstGeom>
+          <a:solidFill>
+            <a:srgbClr val="FFFFFF">
+              <a:alpha val="0"/>
+            </a:srgbClr>
+          </a:solidFill>
+        </p:spPr>
+        <p:txBody>
+          <a:bodyPr anchor="t" rtlCol="false"/>
+          <a:lstStyle/>
+          <a:p>
+            <a:pPr algn="l">
+              <a:defRPr/>
+            </a:pPr>
+            <a:r>
+              <a:rPr lang="zh-CN"/>
+              <a:t/>
+            </a:r>
+            <a:endParaRPr lang="en-US" sz="1100"/>
+          </a:p>
+          <a:p>
+            <a:pPr algn="l"/>
+            <a:r>
+              <a:rPr lang="en-US" sz="1080">
+                <a:solidFill>
+                  <a:srgbClr val="6B7280"/>
+                </a:solidFill>
+                <a:latin typeface="Source Sans 3"/>
+              </a:rPr>
+              <a:t>Visual Document OS</a:t>
+            </a:r>
+            <a:r>
+              <a:rPr lang="en-US" sz="1000">
+                <a:solidFill>
+                  <a:srgbClr val="6B7280"/>
+                </a:solidFill>
+                <a:latin typeface="Source Sans 3"/>
+              </a:rPr>
+              <a:t>    #1/9</a:t>
+            </a:r>
+          </a:p>
+        </p:txBody>
+      </p:sp>
+      <p:sp>
+        <p:nvSpPr>
+          <p:cNvPr name="TextBox 7" id="7"/>
           <p:cNvSpPr txBox="true"/>
           <p:nvPr/>
         </p:nvSpPr>
@@ -4833,7 +4937,7 @@
       </p:sp>
       <p:sp>
         <p:nvSpPr>
-          <p:cNvPr name="TextBox 5" id="5"/>
+          <p:cNvPr name="TextBox 8" id="8"/>
           <p:cNvSpPr txBox="true"/>
           <p:nvPr/>
         </p:nvSpPr>
@@ -4883,7 +4987,7 @@
       </p:sp>
       <p:sp>
         <p:nvSpPr>
-          <p:cNvPr name="TextBox 6" id="6"/>
+          <p:cNvPr name="TextBox 9" id="9"/>
           <p:cNvSpPr txBox="true"/>
           <p:nvPr/>
         </p:nvSpPr>
@@ -4982,19 +5086,43 @@
       </p:sp>
       <p:sp>
         <p:nvSpPr>
-          <p:cNvPr name="TextBox 3" id="3"/>
-          <p:cNvSpPr txBox="true"/>
+          <p:cNvPr name="AutoShape 3" id="3"/>
+          <p:cNvSpPr/>
           <p:nvPr/>
         </p:nvSpPr>
         <p:spPr>
           <a:xfrm>
-            <a:off x="304800" y="152400"/>
-            <a:ext cx="10922000" cy="508000"/>
+            <a:off x="304800" y="495300"/>
+            <a:ext cx="11582400" cy="12700"/>
           </a:xfrm>
           <a:prstGeom prst="rect">
             <a:avLst/>
           </a:prstGeom>
           <a:solidFill>
+            <a:srgbClr val="1D4ED8"/>
+          </a:solidFill>
+          <a:ln>
+            <a:solidFill>
+              <a:srgbClr val="1D4ED8"/>
+            </a:solidFill>
+          </a:ln>
+        </p:spPr>
+      </p:sp>
+      <p:sp>
+        <p:nvSpPr>
+          <p:cNvPr name="TextBox 4" id="4"/>
+          <p:cNvSpPr txBox="true"/>
+          <p:nvPr/>
+        </p:nvSpPr>
+        <p:spPr>
+          <a:xfrm>
+            <a:off x="304800" y="152400"/>
+            <a:ext cx="11582400" cy="330200"/>
+          </a:xfrm>
+          <a:prstGeom prst="rect">
+            <a:avLst/>
+          </a:prstGeom>
+          <a:solidFill>
             <a:srgbClr val="FFFFFF">
               <a:alpha val="0"/>
             </a:srgbClr>
@@ -5016,20 +5144,100 @@
           <a:p>
             <a:pPr algn="l"/>
             <a:r>
-              <a:rPr lang="en-US" sz="1400" b="true">
+              <a:rPr lang="en-US" sz="1285" b="true">
                 <a:solidFill>
                   <a:srgbClr val="6B7280"/>
                 </a:solidFill>
                 <a:ea typeface="Source Sans 3"/>
               </a:rPr>
-              <a:t>议程</a:t>
-            </a:r>
-          </a:p>
-        </p:txBody>
-      </p:sp>
-      <p:sp>
-        <p:nvSpPr>
-          <p:cNvPr name="TextBox 4" id="4"/>
+              <a:t>数字化转型季度复盘（管理层汇报） · 议程</a:t>
+            </a:r>
+          </a:p>
+        </p:txBody>
+      </p:sp>
+      <p:sp>
+        <p:nvSpPr>
+          <p:cNvPr name="AutoShape 5" id="5"/>
+          <p:cNvSpPr/>
+          <p:nvPr/>
+        </p:nvSpPr>
+        <p:spPr>
+          <a:xfrm>
+            <a:off x="304800" y="6426200"/>
+            <a:ext cx="11582400" cy="12700"/>
+          </a:xfrm>
+          <a:prstGeom prst="rect">
+            <a:avLst/>
+          </a:prstGeom>
+          <a:solidFill>
+            <a:srgbClr val="1D4ED8"/>
+          </a:solidFill>
+          <a:ln>
+            <a:solidFill>
+              <a:srgbClr val="1D4ED8"/>
+            </a:solidFill>
+          </a:ln>
+        </p:spPr>
+      </p:sp>
+      <p:sp>
+        <p:nvSpPr>
+          <p:cNvPr name="TextBox 6" id="6"/>
+          <p:cNvSpPr txBox="true"/>
+          <p:nvPr/>
+        </p:nvSpPr>
+        <p:spPr>
+          <a:xfrm>
+            <a:off x="304800" y="6451600"/>
+            <a:ext cx="11582400" cy="279400"/>
+          </a:xfrm>
+          <a:prstGeom prst="rect">
+            <a:avLst/>
+          </a:prstGeom>
+          <a:solidFill>
+            <a:srgbClr val="FFFFFF">
+              <a:alpha val="0"/>
+            </a:srgbClr>
+          </a:solidFill>
+        </p:spPr>
+        <p:txBody>
+          <a:bodyPr anchor="t" rtlCol="false"/>
+          <a:lstStyle/>
+          <a:p>
+            <a:pPr algn="l">
+              <a:defRPr/>
+            </a:pPr>
+            <a:r>
+              <a:rPr lang="zh-CN"/>
+              <a:t/>
+            </a:r>
+            <a:endParaRPr lang="en-US" sz="1100"/>
+          </a:p>
+          <a:p>
+            <a:pPr algn="l"/>
+            <a:r>
+              <a:rPr lang="en-US" sz="1080">
+                <a:solidFill>
+                  <a:srgbClr val="6B7280"/>
+                </a:solidFill>
+                <a:latin typeface="Source Sans 3"/>
+              </a:rPr>
+              <a:t>Visual Document OS</a:t>
+            </a:r>
+            <a:r>
+              <a:rPr lang="en-US" sz="1000">
+                <a:solidFill>
+                  <a:srgbClr val="6B7280"/>
+                </a:solidFill>
+                <a:latin typeface="Source Sans 3"/>
+              </a:rPr>
+              <a:t>    #2/9</a:t>
+            </a:r>
+          </a:p>
+        </p:txBody>
+      </p:sp>
+      <p:sp>
+        <p:nvSpPr>
+          <p:cNvPr name="TextBox 7" id="7"/>
           <p:cNvSpPr txBox="true"/>
           <p:nvPr/>
         </p:nvSpPr>
@@ -5131,19 +5339,43 @@
       </p:sp>
       <p:sp>
         <p:nvSpPr>
-          <p:cNvPr name="TextBox 3" id="3"/>
-          <p:cNvSpPr txBox="true"/>
+          <p:cNvPr name="AutoShape 3" id="3"/>
+          <p:cNvSpPr/>
           <p:nvPr/>
         </p:nvSpPr>
         <p:spPr>
           <a:xfrm>
-            <a:off x="304800" y="152400"/>
-            <a:ext cx="10922000" cy="508000"/>
+            <a:off x="304800" y="495300"/>
+            <a:ext cx="11582400" cy="12700"/>
           </a:xfrm>
           <a:prstGeom prst="rect">
             <a:avLst/>
           </a:prstGeom>
           <a:solidFill>
+            <a:srgbClr val="1D4ED8"/>
+          </a:solidFill>
+          <a:ln>
+            <a:solidFill>
+              <a:srgbClr val="1D4ED8"/>
+            </a:solidFill>
+          </a:ln>
+        </p:spPr>
+      </p:sp>
+      <p:sp>
+        <p:nvSpPr>
+          <p:cNvPr name="TextBox 4" id="4"/>
+          <p:cNvSpPr txBox="true"/>
+          <p:nvPr/>
+        </p:nvSpPr>
+        <p:spPr>
+          <a:xfrm>
+            <a:off x="304800" y="152400"/>
+            <a:ext cx="11582400" cy="330200"/>
+          </a:xfrm>
+          <a:prstGeom prst="rect">
+            <a:avLst/>
+          </a:prstGeom>
+          <a:solidFill>
             <a:srgbClr val="FFFFFF">
               <a:alpha val="0"/>
             </a:srgbClr>
@@ -5165,20 +5397,100 @@
           <a:p>
             <a:pPr algn="l"/>
             <a:r>
-              <a:rPr lang="en-US" sz="1400" b="true">
+              <a:rPr lang="en-US" sz="1285" b="true">
                 <a:solidFill>
                   <a:srgbClr val="6B7280"/>
                 </a:solidFill>
                 <a:ea typeface="Source Sans 3"/>
               </a:rPr>
-              <a:t>管理层摘要</a:t>
-            </a:r>
-          </a:p>
-        </p:txBody>
-      </p:sp>
-      <p:sp>
-        <p:nvSpPr>
-          <p:cNvPr name="TextBox 4" id="4"/>
+              <a:t>数字化转型季度复盘（管理层汇报） · 管理层摘要</a:t>
+            </a:r>
+          </a:p>
+        </p:txBody>
+      </p:sp>
+      <p:sp>
+        <p:nvSpPr>
+          <p:cNvPr name="AutoShape 5" id="5"/>
+          <p:cNvSpPr/>
+          <p:nvPr/>
+        </p:nvSpPr>
+        <p:spPr>
+          <a:xfrm>
+            <a:off x="304800" y="6426200"/>
+            <a:ext cx="11582400" cy="12700"/>
+          </a:xfrm>
+          <a:prstGeom prst="rect">
+            <a:avLst/>
+          </a:prstGeom>
+          <a:solidFill>
+            <a:srgbClr val="1D4ED8"/>
+          </a:solidFill>
+          <a:ln>
+            <a:solidFill>
+              <a:srgbClr val="1D4ED8"/>
+            </a:solidFill>
+          </a:ln>
+        </p:spPr>
+      </p:sp>
+      <p:sp>
+        <p:nvSpPr>
+          <p:cNvPr name="TextBox 6" id="6"/>
+          <p:cNvSpPr txBox="true"/>
+          <p:nvPr/>
+        </p:nvSpPr>
+        <p:spPr>
+          <a:xfrm>
+            <a:off x="304800" y="6451600"/>
+            <a:ext cx="11582400" cy="279400"/>
+          </a:xfrm>
+          <a:prstGeom prst="rect">
+            <a:avLst/>
+          </a:prstGeom>
+          <a:solidFill>
+            <a:srgbClr val="FFFFFF">
+              <a:alpha val="0"/>
+            </a:srgbClr>
+          </a:solidFill>
+        </p:spPr>
+        <p:txBody>
+          <a:bodyPr anchor="t" rtlCol="false"/>
+          <a:lstStyle/>
+          <a:p>
+            <a:pPr algn="l">
+              <a:defRPr/>
+            </a:pPr>
+            <a:r>
+              <a:rPr lang="zh-CN"/>
+              <a:t/>
+            </a:r>
+            <a:endParaRPr lang="en-US" sz="1100"/>
+          </a:p>
+          <a:p>
+            <a:pPr algn="l"/>
+            <a:r>
+              <a:rPr lang="en-US" sz="1080">
+                <a:solidFill>
+                  <a:srgbClr val="6B7280"/>
+                </a:solidFill>
+                <a:latin typeface="Source Sans 3"/>
+              </a:rPr>
+              <a:t>Visual Document OS</a:t>
+            </a:r>
+            <a:r>
+              <a:rPr lang="en-US" sz="1000">
+                <a:solidFill>
+                  <a:srgbClr val="6B7280"/>
+                </a:solidFill>
+                <a:latin typeface="Source Sans 3"/>
+              </a:rPr>
+              <a:t>    #3/9</a:t>
+            </a:r>
+          </a:p>
+        </p:txBody>
+      </p:sp>
+      <p:sp>
+        <p:nvSpPr>
+          <p:cNvPr name="TextBox 7" id="7"/>
           <p:cNvSpPr txBox="true"/>
           <p:nvPr/>
         </p:nvSpPr>
@@ -5283,19 +5595,43 @@
       </p:sp>
       <p:sp>
         <p:nvSpPr>
-          <p:cNvPr name="TextBox 3" id="3"/>
-          <p:cNvSpPr txBox="true"/>
+          <p:cNvPr name="AutoShape 3" id="3"/>
+          <p:cNvSpPr/>
           <p:nvPr/>
         </p:nvSpPr>
         <p:spPr>
           <a:xfrm>
-            <a:off x="304800" y="152400"/>
-            <a:ext cx="10922000" cy="508000"/>
+            <a:off x="304800" y="495300"/>
+            <a:ext cx="11582400" cy="12700"/>
           </a:xfrm>
           <a:prstGeom prst="rect">
             <a:avLst/>
           </a:prstGeom>
           <a:solidFill>
+            <a:srgbClr val="1D4ED8"/>
+          </a:solidFill>
+          <a:ln>
+            <a:solidFill>
+              <a:srgbClr val="1D4ED8"/>
+            </a:solidFill>
+          </a:ln>
+        </p:spPr>
+      </p:sp>
+      <p:sp>
+        <p:nvSpPr>
+          <p:cNvPr name="TextBox 4" id="4"/>
+          <p:cNvSpPr txBox="true"/>
+          <p:nvPr/>
+        </p:nvSpPr>
+        <p:spPr>
+          <a:xfrm>
+            <a:off x="304800" y="152400"/>
+            <a:ext cx="11582400" cy="330200"/>
+          </a:xfrm>
+          <a:prstGeom prst="rect">
+            <a:avLst/>
+          </a:prstGeom>
+          <a:solidFill>
             <a:srgbClr val="FFFFFF">
               <a:alpha val="0"/>
             </a:srgbClr>
@@ -5317,20 +5653,100 @@
           <a:p>
             <a:pPr algn="l"/>
             <a:r>
-              <a:rPr lang="en-US" sz="1400" b="true">
+              <a:rPr lang="en-US" sz="1285" b="true">
                 <a:solidFill>
                   <a:srgbClr val="6B7280"/>
                 </a:solidFill>
                 <a:ea typeface="Source Sans 3"/>
               </a:rPr>
-              <a:t>经营增长（图表 + 总结左右布局）</a:t>
+              <a:t>数字化转型季度复盘（管理层汇报） · 经营增长（图表 + 总结左右布局）</a:t>
+            </a:r>
+          </a:p>
+        </p:txBody>
+      </p:sp>
+      <p:sp>
+        <p:nvSpPr>
+          <p:cNvPr name="AutoShape 5" id="5"/>
+          <p:cNvSpPr/>
+          <p:nvPr/>
+        </p:nvSpPr>
+        <p:spPr>
+          <a:xfrm>
+            <a:off x="304800" y="6426200"/>
+            <a:ext cx="11582400" cy="12700"/>
+          </a:xfrm>
+          <a:prstGeom prst="rect">
+            <a:avLst/>
+          </a:prstGeom>
+          <a:solidFill>
+            <a:srgbClr val="1D4ED8"/>
+          </a:solidFill>
+          <a:ln>
+            <a:solidFill>
+              <a:srgbClr val="1D4ED8"/>
+            </a:solidFill>
+          </a:ln>
+        </p:spPr>
+      </p:sp>
+      <p:sp>
+        <p:nvSpPr>
+          <p:cNvPr name="TextBox 6" id="6"/>
+          <p:cNvSpPr txBox="true"/>
+          <p:nvPr/>
+        </p:nvSpPr>
+        <p:spPr>
+          <a:xfrm>
+            <a:off x="304800" y="6451600"/>
+            <a:ext cx="11582400" cy="279400"/>
+          </a:xfrm>
+          <a:prstGeom prst="rect">
+            <a:avLst/>
+          </a:prstGeom>
+          <a:solidFill>
+            <a:srgbClr val="FFFFFF">
+              <a:alpha val="0"/>
+            </a:srgbClr>
+          </a:solidFill>
+        </p:spPr>
+        <p:txBody>
+          <a:bodyPr anchor="t" rtlCol="false"/>
+          <a:lstStyle/>
+          <a:p>
+            <a:pPr algn="l">
+              <a:defRPr/>
+            </a:pPr>
+            <a:r>
+              <a:rPr lang="zh-CN"/>
+              <a:t/>
+            </a:r>
+            <a:endParaRPr lang="en-US" sz="1100"/>
+          </a:p>
+          <a:p>
+            <a:pPr algn="l"/>
+            <a:r>
+              <a:rPr lang="en-US" sz="1080">
+                <a:solidFill>
+                  <a:srgbClr val="6B7280"/>
+                </a:solidFill>
+                <a:latin typeface="Source Sans 3"/>
+              </a:rPr>
+              <a:t>Visual Document OS</a:t>
+            </a:r>
+            <a:r>
+              <a:rPr lang="en-US" sz="1000">
+                <a:solidFill>
+                  <a:srgbClr val="6B7280"/>
+                </a:solidFill>
+                <a:latin typeface="Source Sans 3"/>
+              </a:rPr>
+              <a:t>    #4/9</a:t>
             </a:r>
           </a:p>
         </p:txBody>
       </p:sp>
       <p:graphicFrame>
         <p:nvGraphicFramePr>
-          <p:cNvPr name="Chart 4" id="4"/>
+          <p:cNvPr name="Chart 7" id="7"/>
           <p:cNvGraphicFramePr>
             <a:graphicFrameLocks noGrp="true"/>
           </p:cNvGraphicFramePr>
@@ -5348,7 +5764,7 @@
       </p:graphicFrame>
       <p:sp>
         <p:nvSpPr>
-          <p:cNvPr name="TextBox 5" id="5"/>
+          <p:cNvPr name="TextBox 8" id="8"/>
           <p:cNvSpPr txBox="true"/>
           <p:nvPr/>
         </p:nvSpPr>
@@ -5450,19 +5866,43 @@
       </p:sp>
       <p:sp>
         <p:nvSpPr>
-          <p:cNvPr name="TextBox 3" id="3"/>
-          <p:cNvSpPr txBox="true"/>
+          <p:cNvPr name="AutoShape 3" id="3"/>
+          <p:cNvSpPr/>
           <p:nvPr/>
         </p:nvSpPr>
         <p:spPr>
           <a:xfrm>
-            <a:off x="304800" y="152400"/>
-            <a:ext cx="10922000" cy="508000"/>
+            <a:off x="304800" y="495300"/>
+            <a:ext cx="11582400" cy="12700"/>
           </a:xfrm>
           <a:prstGeom prst="rect">
             <a:avLst/>
           </a:prstGeom>
           <a:solidFill>
+            <a:srgbClr val="1D4ED8"/>
+          </a:solidFill>
+          <a:ln>
+            <a:solidFill>
+              <a:srgbClr val="1D4ED8"/>
+            </a:solidFill>
+          </a:ln>
+        </p:spPr>
+      </p:sp>
+      <p:sp>
+        <p:nvSpPr>
+          <p:cNvPr name="TextBox 4" id="4"/>
+          <p:cNvSpPr txBox="true"/>
+          <p:nvPr/>
+        </p:nvSpPr>
+        <p:spPr>
+          <a:xfrm>
+            <a:off x="304800" y="152400"/>
+            <a:ext cx="11582400" cy="330200"/>
+          </a:xfrm>
+          <a:prstGeom prst="rect">
+            <a:avLst/>
+          </a:prstGeom>
+          <a:solidFill>
             <a:srgbClr val="FFFFFF">
               <a:alpha val="0"/>
             </a:srgbClr>
@@ -5484,20 +5924,100 @@
           <a:p>
             <a:pPr algn="l"/>
             <a:r>
-              <a:rPr lang="en-US" sz="1400" b="true">
+              <a:rPr lang="en-US" sz="1285" b="true">
                 <a:solidFill>
                   <a:srgbClr val="6B7280"/>
                 </a:solidFill>
                 <a:ea typeface="Source Sans 3"/>
               </a:rPr>
-              <a:t>利润与订单（图表 + 总结上下布局）</a:t>
+              <a:t>数字化转型季度复盘（管理层汇报） · 利润与订单（图表 + 总结上下布局）</a:t>
+            </a:r>
+          </a:p>
+        </p:txBody>
+      </p:sp>
+      <p:sp>
+        <p:nvSpPr>
+          <p:cNvPr name="AutoShape 5" id="5"/>
+          <p:cNvSpPr/>
+          <p:nvPr/>
+        </p:nvSpPr>
+        <p:spPr>
+          <a:xfrm>
+            <a:off x="304800" y="6426200"/>
+            <a:ext cx="11582400" cy="12700"/>
+          </a:xfrm>
+          <a:prstGeom prst="rect">
+            <a:avLst/>
+          </a:prstGeom>
+          <a:solidFill>
+            <a:srgbClr val="1D4ED8"/>
+          </a:solidFill>
+          <a:ln>
+            <a:solidFill>
+              <a:srgbClr val="1D4ED8"/>
+            </a:solidFill>
+          </a:ln>
+        </p:spPr>
+      </p:sp>
+      <p:sp>
+        <p:nvSpPr>
+          <p:cNvPr name="TextBox 6" id="6"/>
+          <p:cNvSpPr txBox="true"/>
+          <p:nvPr/>
+        </p:nvSpPr>
+        <p:spPr>
+          <a:xfrm>
+            <a:off x="304800" y="6451600"/>
+            <a:ext cx="11582400" cy="279400"/>
+          </a:xfrm>
+          <a:prstGeom prst="rect">
+            <a:avLst/>
+          </a:prstGeom>
+          <a:solidFill>
+            <a:srgbClr val="FFFFFF">
+              <a:alpha val="0"/>
+            </a:srgbClr>
+          </a:solidFill>
+        </p:spPr>
+        <p:txBody>
+          <a:bodyPr anchor="t" rtlCol="false"/>
+          <a:lstStyle/>
+          <a:p>
+            <a:pPr algn="l">
+              <a:defRPr/>
+            </a:pPr>
+            <a:r>
+              <a:rPr lang="zh-CN"/>
+              <a:t/>
+            </a:r>
+            <a:endParaRPr lang="en-US" sz="1100"/>
+          </a:p>
+          <a:p>
+            <a:pPr algn="l"/>
+            <a:r>
+              <a:rPr lang="en-US" sz="1080">
+                <a:solidFill>
+                  <a:srgbClr val="6B7280"/>
+                </a:solidFill>
+                <a:latin typeface="Source Sans 3"/>
+              </a:rPr>
+              <a:t>Visual Document OS</a:t>
+            </a:r>
+            <a:r>
+              <a:rPr lang="en-US" sz="1000">
+                <a:solidFill>
+                  <a:srgbClr val="6B7280"/>
+                </a:solidFill>
+                <a:latin typeface="Source Sans 3"/>
+              </a:rPr>
+              <a:t>    #5/9</a:t>
             </a:r>
           </a:p>
         </p:txBody>
       </p:sp>
       <p:graphicFrame>
         <p:nvGraphicFramePr>
-          <p:cNvPr name="Chart 4" id="4"/>
+          <p:cNvPr name="Chart 7" id="7"/>
           <p:cNvGraphicFramePr>
             <a:graphicFrameLocks noGrp="true"/>
           </p:cNvGraphicFramePr>
@@ -5515,7 +6035,7 @@
       </p:graphicFrame>
       <p:sp>
         <p:nvSpPr>
-          <p:cNvPr name="TextBox 5" id="5"/>
+          <p:cNvPr name="TextBox 8" id="8"/>
           <p:cNvSpPr txBox="true"/>
           <p:nvPr/>
         </p:nvSpPr>
@@ -5616,19 +6136,43 @@
       </p:sp>
       <p:sp>
         <p:nvSpPr>
-          <p:cNvPr name="TextBox 3" id="3"/>
-          <p:cNvSpPr txBox="true"/>
+          <p:cNvPr name="AutoShape 3" id="3"/>
+          <p:cNvSpPr/>
           <p:nvPr/>
         </p:nvSpPr>
         <p:spPr>
           <a:xfrm>
-            <a:off x="304800" y="152400"/>
-            <a:ext cx="10922000" cy="508000"/>
+            <a:off x="304800" y="495300"/>
+            <a:ext cx="11582400" cy="12700"/>
           </a:xfrm>
           <a:prstGeom prst="rect">
             <a:avLst/>
           </a:prstGeom>
           <a:solidFill>
+            <a:srgbClr val="1D4ED8"/>
+          </a:solidFill>
+          <a:ln>
+            <a:solidFill>
+              <a:srgbClr val="1D4ED8"/>
+            </a:solidFill>
+          </a:ln>
+        </p:spPr>
+      </p:sp>
+      <p:sp>
+        <p:nvSpPr>
+          <p:cNvPr name="TextBox 4" id="4"/>
+          <p:cNvSpPr txBox="true"/>
+          <p:nvPr/>
+        </p:nvSpPr>
+        <p:spPr>
+          <a:xfrm>
+            <a:off x="304800" y="152400"/>
+            <a:ext cx="11582400" cy="330200"/>
+          </a:xfrm>
+          <a:prstGeom prst="rect">
+            <a:avLst/>
+          </a:prstGeom>
+          <a:solidFill>
             <a:srgbClr val="FFFFFF">
               <a:alpha val="0"/>
             </a:srgbClr>
@@ -5650,20 +6194,100 @@
           <a:p>
             <a:pPr algn="l"/>
             <a:r>
-              <a:rPr lang="en-US" sz="1400" b="true">
+              <a:rPr lang="en-US" sz="1285" b="true">
                 <a:solidFill>
                   <a:srgbClr val="6B7280"/>
                 </a:solidFill>
                 <a:ea typeface="Source Sans 3"/>
               </a:rPr>
-              <a:t>稳定性与体验</a:t>
+              <a:t>数字化转型季度复盘（管理层汇报） · 稳定性与体验</a:t>
+            </a:r>
+          </a:p>
+        </p:txBody>
+      </p:sp>
+      <p:sp>
+        <p:nvSpPr>
+          <p:cNvPr name="AutoShape 5" id="5"/>
+          <p:cNvSpPr/>
+          <p:nvPr/>
+        </p:nvSpPr>
+        <p:spPr>
+          <a:xfrm>
+            <a:off x="304800" y="6426200"/>
+            <a:ext cx="11582400" cy="12700"/>
+          </a:xfrm>
+          <a:prstGeom prst="rect">
+            <a:avLst/>
+          </a:prstGeom>
+          <a:solidFill>
+            <a:srgbClr val="1D4ED8"/>
+          </a:solidFill>
+          <a:ln>
+            <a:solidFill>
+              <a:srgbClr val="1D4ED8"/>
+            </a:solidFill>
+          </a:ln>
+        </p:spPr>
+      </p:sp>
+      <p:sp>
+        <p:nvSpPr>
+          <p:cNvPr name="TextBox 6" id="6"/>
+          <p:cNvSpPr txBox="true"/>
+          <p:nvPr/>
+        </p:nvSpPr>
+        <p:spPr>
+          <a:xfrm>
+            <a:off x="304800" y="6451600"/>
+            <a:ext cx="11582400" cy="279400"/>
+          </a:xfrm>
+          <a:prstGeom prst="rect">
+            <a:avLst/>
+          </a:prstGeom>
+          <a:solidFill>
+            <a:srgbClr val="FFFFFF">
+              <a:alpha val="0"/>
+            </a:srgbClr>
+          </a:solidFill>
+        </p:spPr>
+        <p:txBody>
+          <a:bodyPr anchor="t" rtlCol="false"/>
+          <a:lstStyle/>
+          <a:p>
+            <a:pPr algn="l">
+              <a:defRPr/>
+            </a:pPr>
+            <a:r>
+              <a:rPr lang="zh-CN"/>
+              <a:t/>
+            </a:r>
+            <a:endParaRPr lang="en-US" sz="1100"/>
+          </a:p>
+          <a:p>
+            <a:pPr algn="l"/>
+            <a:r>
+              <a:rPr lang="en-US" sz="1080">
+                <a:solidFill>
+                  <a:srgbClr val="6B7280"/>
+                </a:solidFill>
+                <a:latin typeface="Source Sans 3"/>
+              </a:rPr>
+              <a:t>Visual Document OS</a:t>
+            </a:r>
+            <a:r>
+              <a:rPr lang="en-US" sz="1000">
+                <a:solidFill>
+                  <a:srgbClr val="6B7280"/>
+                </a:solidFill>
+                <a:latin typeface="Source Sans 3"/>
+              </a:rPr>
+              <a:t>    #6/9</a:t>
             </a:r>
           </a:p>
         </p:txBody>
       </p:sp>
       <p:graphicFrame>
         <p:nvGraphicFramePr>
-          <p:cNvPr name="Chart 4" id="4"/>
+          <p:cNvPr name="Chart 7" id="7"/>
           <p:cNvGraphicFramePr>
             <a:graphicFrameLocks noGrp="true"/>
           </p:cNvGraphicFramePr>
@@ -5681,7 +6305,7 @@
       </p:graphicFrame>
       <p:graphicFrame>
         <p:nvGraphicFramePr>
-          <p:cNvPr name="Chart 5" id="5"/>
+          <p:cNvPr name="Chart 8" id="8"/>
           <p:cNvGraphicFramePr>
             <a:graphicFrameLocks noGrp="true"/>
           </p:cNvGraphicFramePr>
@@ -5699,7 +6323,7 @@
       </p:graphicFrame>
       <p:sp>
         <p:nvSpPr>
-          <p:cNvPr name="TextBox 6" id="6"/>
+          <p:cNvPr name="TextBox 9" id="9"/>
           <p:cNvSpPr txBox="true"/>
           <p:nvPr/>
         </p:nvSpPr>
@@ -5798,19 +6422,43 @@
       </p:sp>
       <p:sp>
         <p:nvSpPr>
-          <p:cNvPr name="TextBox 3" id="3"/>
-          <p:cNvSpPr txBox="true"/>
+          <p:cNvPr name="AutoShape 3" id="3"/>
+          <p:cNvSpPr/>
           <p:nvPr/>
         </p:nvSpPr>
         <p:spPr>
           <a:xfrm>
-            <a:off x="304800" y="152400"/>
-            <a:ext cx="10922000" cy="508000"/>
+            <a:off x="304800" y="495300"/>
+            <a:ext cx="11582400" cy="12700"/>
           </a:xfrm>
           <a:prstGeom prst="rect">
             <a:avLst/>
           </a:prstGeom>
           <a:solidFill>
+            <a:srgbClr val="1D4ED8"/>
+          </a:solidFill>
+          <a:ln>
+            <a:solidFill>
+              <a:srgbClr val="1D4ED8"/>
+            </a:solidFill>
+          </a:ln>
+        </p:spPr>
+      </p:sp>
+      <p:sp>
+        <p:nvSpPr>
+          <p:cNvPr name="TextBox 4" id="4"/>
+          <p:cNvSpPr txBox="true"/>
+          <p:nvPr/>
+        </p:nvSpPr>
+        <p:spPr>
+          <a:xfrm>
+            <a:off x="304800" y="152400"/>
+            <a:ext cx="11582400" cy="330200"/>
+          </a:xfrm>
+          <a:prstGeom prst="rect">
+            <a:avLst/>
+          </a:prstGeom>
+          <a:solidFill>
             <a:srgbClr val="FFFFFF">
               <a:alpha val="0"/>
             </a:srgbClr>
@@ -5832,20 +6480,100 @@
           <a:p>
             <a:pPr algn="l"/>
             <a:r>
-              <a:rPr lang="en-US" sz="1400" b="true">
+              <a:rPr lang="en-US" sz="1285" b="true">
                 <a:solidFill>
                   <a:srgbClr val="6B7280"/>
                 </a:solidFill>
                 <a:ea typeface="Source Sans 3"/>
               </a:rPr>
-              <a:t>转型项目推进与风险</a:t>
+              <a:t>数字化转型季度复盘（管理层汇报） · 转型项目推进与风险</a:t>
+            </a:r>
+          </a:p>
+        </p:txBody>
+      </p:sp>
+      <p:sp>
+        <p:nvSpPr>
+          <p:cNvPr name="AutoShape 5" id="5"/>
+          <p:cNvSpPr/>
+          <p:nvPr/>
+        </p:nvSpPr>
+        <p:spPr>
+          <a:xfrm>
+            <a:off x="304800" y="6426200"/>
+            <a:ext cx="11582400" cy="12700"/>
+          </a:xfrm>
+          <a:prstGeom prst="rect">
+            <a:avLst/>
+          </a:prstGeom>
+          <a:solidFill>
+            <a:srgbClr val="1D4ED8"/>
+          </a:solidFill>
+          <a:ln>
+            <a:solidFill>
+              <a:srgbClr val="1D4ED8"/>
+            </a:solidFill>
+          </a:ln>
+        </p:spPr>
+      </p:sp>
+      <p:sp>
+        <p:nvSpPr>
+          <p:cNvPr name="TextBox 6" id="6"/>
+          <p:cNvSpPr txBox="true"/>
+          <p:nvPr/>
+        </p:nvSpPr>
+        <p:spPr>
+          <a:xfrm>
+            <a:off x="304800" y="6451600"/>
+            <a:ext cx="11582400" cy="279400"/>
+          </a:xfrm>
+          <a:prstGeom prst="rect">
+            <a:avLst/>
+          </a:prstGeom>
+          <a:solidFill>
+            <a:srgbClr val="FFFFFF">
+              <a:alpha val="0"/>
+            </a:srgbClr>
+          </a:solidFill>
+        </p:spPr>
+        <p:txBody>
+          <a:bodyPr anchor="t" rtlCol="false"/>
+          <a:lstStyle/>
+          <a:p>
+            <a:pPr algn="l">
+              <a:defRPr/>
+            </a:pPr>
+            <a:r>
+              <a:rPr lang="zh-CN"/>
+              <a:t/>
+            </a:r>
+            <a:endParaRPr lang="en-US" sz="1100"/>
+          </a:p>
+          <a:p>
+            <a:pPr algn="l"/>
+            <a:r>
+              <a:rPr lang="en-US" sz="1080">
+                <a:solidFill>
+                  <a:srgbClr val="6B7280"/>
+                </a:solidFill>
+                <a:latin typeface="Source Sans 3"/>
+              </a:rPr>
+              <a:t>Visual Document OS</a:t>
+            </a:r>
+            <a:r>
+              <a:rPr lang="en-US" sz="1000">
+                <a:solidFill>
+                  <a:srgbClr val="6B7280"/>
+                </a:solidFill>
+                <a:latin typeface="Source Sans 3"/>
+              </a:rPr>
+              <a:t>    #7/9</a:t>
             </a:r>
           </a:p>
         </p:txBody>
       </p:sp>
       <p:graphicFrame>
         <p:nvGraphicFramePr>
-          <p:cNvPr name="Chart 4" id="4"/>
+          <p:cNvPr name="Chart 7" id="7"/>
           <p:cNvGraphicFramePr>
             <a:graphicFrameLocks noGrp="true"/>
           </p:cNvGraphicFramePr>
@@ -5863,7 +6591,7 @@
       </p:graphicFrame>
       <p:graphicFrame>
         <p:nvGraphicFramePr>
-          <p:cNvPr name="Chart 5" id="5"/>
+          <p:cNvPr name="Chart 8" id="8"/>
           <p:cNvGraphicFramePr>
             <a:graphicFrameLocks noGrp="true"/>
           </p:cNvGraphicFramePr>
@@ -5881,7 +6609,7 @@
       </p:graphicFrame>
       <p:sp>
         <p:nvSpPr>
-          <p:cNvPr name="TextBox 6" id="6"/>
+          <p:cNvPr name="TextBox 9" id="9"/>
           <p:cNvSpPr txBox="true"/>
           <p:nvPr/>
         </p:nvSpPr>
@@ -5980,19 +6708,43 @@
       </p:sp>
       <p:sp>
         <p:nvSpPr>
-          <p:cNvPr name="TextBox 3" id="3"/>
-          <p:cNvSpPr txBox="true"/>
+          <p:cNvPr name="AutoShape 3" id="3"/>
+          <p:cNvSpPr/>
           <p:nvPr/>
         </p:nvSpPr>
         <p:spPr>
           <a:xfrm>
-            <a:off x="304800" y="152400"/>
-            <a:ext cx="10922000" cy="508000"/>
+            <a:off x="304800" y="495300"/>
+            <a:ext cx="11582400" cy="12700"/>
           </a:xfrm>
           <a:prstGeom prst="rect">
             <a:avLst/>
           </a:prstGeom>
           <a:solidFill>
+            <a:srgbClr val="1D4ED8"/>
+          </a:solidFill>
+          <a:ln>
+            <a:solidFill>
+              <a:srgbClr val="1D4ED8"/>
+            </a:solidFill>
+          </a:ln>
+        </p:spPr>
+      </p:sp>
+      <p:sp>
+        <p:nvSpPr>
+          <p:cNvPr name="TextBox 4" id="4"/>
+          <p:cNvSpPr txBox="true"/>
+          <p:nvPr/>
+        </p:nvSpPr>
+        <p:spPr>
+          <a:xfrm>
+            <a:off x="304800" y="152400"/>
+            <a:ext cx="11582400" cy="330200"/>
+          </a:xfrm>
+          <a:prstGeom prst="rect">
+            <a:avLst/>
+          </a:prstGeom>
+          <a:solidFill>
             <a:srgbClr val="FFFFFF">
               <a:alpha val="0"/>
             </a:srgbClr>
@@ -6014,20 +6766,100 @@
           <a:p>
             <a:pPr algn="l"/>
             <a:r>
-              <a:rPr lang="en-US" sz="1400" b="true">
+              <a:rPr lang="en-US" sz="1285" b="true">
                 <a:solidFill>
                   <a:srgbClr val="6B7280"/>
                 </a:solidFill>
                 <a:ea typeface="Source Sans 3"/>
               </a:rPr>
-              <a:t>多图表类型视角</a:t>
+              <a:t>数字化转型季度复盘（管理层汇报） · 多图表类型视角</a:t>
+            </a:r>
+          </a:p>
+        </p:txBody>
+      </p:sp>
+      <p:sp>
+        <p:nvSpPr>
+          <p:cNvPr name="AutoShape 5" id="5"/>
+          <p:cNvSpPr/>
+          <p:nvPr/>
+        </p:nvSpPr>
+        <p:spPr>
+          <a:xfrm>
+            <a:off x="304800" y="6426200"/>
+            <a:ext cx="11582400" cy="12700"/>
+          </a:xfrm>
+          <a:prstGeom prst="rect">
+            <a:avLst/>
+          </a:prstGeom>
+          <a:solidFill>
+            <a:srgbClr val="1D4ED8"/>
+          </a:solidFill>
+          <a:ln>
+            <a:solidFill>
+              <a:srgbClr val="1D4ED8"/>
+            </a:solidFill>
+          </a:ln>
+        </p:spPr>
+      </p:sp>
+      <p:sp>
+        <p:nvSpPr>
+          <p:cNvPr name="TextBox 6" id="6"/>
+          <p:cNvSpPr txBox="true"/>
+          <p:nvPr/>
+        </p:nvSpPr>
+        <p:spPr>
+          <a:xfrm>
+            <a:off x="304800" y="6451600"/>
+            <a:ext cx="11582400" cy="279400"/>
+          </a:xfrm>
+          <a:prstGeom prst="rect">
+            <a:avLst/>
+          </a:prstGeom>
+          <a:solidFill>
+            <a:srgbClr val="FFFFFF">
+              <a:alpha val="0"/>
+            </a:srgbClr>
+          </a:solidFill>
+        </p:spPr>
+        <p:txBody>
+          <a:bodyPr anchor="t" rtlCol="false"/>
+          <a:lstStyle/>
+          <a:p>
+            <a:pPr algn="l">
+              <a:defRPr/>
+            </a:pPr>
+            <a:r>
+              <a:rPr lang="zh-CN"/>
+              <a:t/>
+            </a:r>
+            <a:endParaRPr lang="en-US" sz="1100"/>
+          </a:p>
+          <a:p>
+            <a:pPr algn="l"/>
+            <a:r>
+              <a:rPr lang="en-US" sz="1080">
+                <a:solidFill>
+                  <a:srgbClr val="6B7280"/>
+                </a:solidFill>
+                <a:latin typeface="Source Sans 3"/>
+              </a:rPr>
+              <a:t>Visual Document OS</a:t>
+            </a:r>
+            <a:r>
+              <a:rPr lang="en-US" sz="1000">
+                <a:solidFill>
+                  <a:srgbClr val="6B7280"/>
+                </a:solidFill>
+                <a:latin typeface="Source Sans 3"/>
+              </a:rPr>
+              <a:t>    #8/9</a:t>
             </a:r>
           </a:p>
         </p:txBody>
       </p:sp>
       <p:graphicFrame>
         <p:nvGraphicFramePr>
-          <p:cNvPr name="Chart 4" id="4"/>
+          <p:cNvPr name="Chart 7" id="7"/>
           <p:cNvGraphicFramePr>
             <a:graphicFrameLocks noGrp="true"/>
           </p:cNvGraphicFramePr>
@@ -6045,7 +6877,7 @@
       </p:graphicFrame>
       <p:graphicFrame>
         <p:nvGraphicFramePr>
-          <p:cNvPr name="Chart 5" id="5"/>
+          <p:cNvPr name="Chart 8" id="8"/>
           <p:cNvGraphicFramePr>
             <a:graphicFrameLocks noGrp="true"/>
           </p:cNvGraphicFramePr>
@@ -6063,7 +6895,7 @@
       </p:graphicFrame>
       <p:graphicFrame>
         <p:nvGraphicFramePr>
-          <p:cNvPr name="Chart 6" id="6"/>
+          <p:cNvPr name="Chart 9" id="9"/>
           <p:cNvGraphicFramePr>
             <a:graphicFrameLocks noGrp="true"/>
           </p:cNvGraphicFramePr>
@@ -6081,7 +6913,7 @@
       </p:graphicFrame>
       <p:graphicFrame>
         <p:nvGraphicFramePr>
-          <p:cNvPr name="Chart 7" id="7"/>
+          <p:cNvPr name="Chart 10" id="10"/>
           <p:cNvGraphicFramePr>
             <a:graphicFrameLocks noGrp="true"/>
           </p:cNvGraphicFramePr>
@@ -6099,7 +6931,7 @@
       </p:graphicFrame>
       <p:graphicFrame>
         <p:nvGraphicFramePr>
-          <p:cNvPr name="Chart 8" id="8"/>
+          <p:cNvPr name="Chart 11" id="11"/>
           <p:cNvGraphicFramePr>
             <a:graphicFrameLocks noGrp="true"/>
           </p:cNvGraphicFramePr>
@@ -6166,19 +6998,43 @@
       </p:sp>
       <p:sp>
         <p:nvSpPr>
-          <p:cNvPr name="TextBox 3" id="3"/>
-          <p:cNvSpPr txBox="true"/>
+          <p:cNvPr name="AutoShape 3" id="3"/>
+          <p:cNvSpPr/>
           <p:nvPr/>
         </p:nvSpPr>
         <p:spPr>
           <a:xfrm>
-            <a:off x="304800" y="152400"/>
-            <a:ext cx="10922000" cy="508000"/>
+            <a:off x="304800" y="495300"/>
+            <a:ext cx="11582400" cy="12700"/>
           </a:xfrm>
           <a:prstGeom prst="rect">
             <a:avLst/>
           </a:prstGeom>
           <a:solidFill>
+            <a:srgbClr val="1D4ED8"/>
+          </a:solidFill>
+          <a:ln>
+            <a:solidFill>
+              <a:srgbClr val="1D4ED8"/>
+            </a:solidFill>
+          </a:ln>
+        </p:spPr>
+      </p:sp>
+      <p:sp>
+        <p:nvSpPr>
+          <p:cNvPr name="TextBox 4" id="4"/>
+          <p:cNvSpPr txBox="true"/>
+          <p:nvPr/>
+        </p:nvSpPr>
+        <p:spPr>
+          <a:xfrm>
+            <a:off x="304800" y="152400"/>
+            <a:ext cx="11582400" cy="330200"/>
+          </a:xfrm>
+          <a:prstGeom prst="rect">
+            <a:avLst/>
+          </a:prstGeom>
+          <a:solidFill>
             <a:srgbClr val="FFFFFF">
               <a:alpha val="0"/>
             </a:srgbClr>
@@ -6200,20 +7056,100 @@
           <a:p>
             <a:pPr algn="l"/>
             <a:r>
-              <a:rPr lang="en-US" sz="1400" b="true">
+              <a:rPr lang="en-US" sz="1285" b="true">
                 <a:solidFill>
                   <a:srgbClr val="6B7280"/>
                 </a:solidFill>
                 <a:ea typeface="Source Sans 3"/>
               </a:rPr>
-              <a:t>决策请求</a:t>
-            </a:r>
-          </a:p>
-        </p:txBody>
-      </p:sp>
-      <p:sp>
-        <p:nvSpPr>
-          <p:cNvPr name="TextBox 4" id="4"/>
+              <a:t>数字化转型季度复盘（管理层汇报） · 决策请求</a:t>
+            </a:r>
+          </a:p>
+        </p:txBody>
+      </p:sp>
+      <p:sp>
+        <p:nvSpPr>
+          <p:cNvPr name="AutoShape 5" id="5"/>
+          <p:cNvSpPr/>
+          <p:nvPr/>
+        </p:nvSpPr>
+        <p:spPr>
+          <a:xfrm>
+            <a:off x="304800" y="6426200"/>
+            <a:ext cx="11582400" cy="12700"/>
+          </a:xfrm>
+          <a:prstGeom prst="rect">
+            <a:avLst/>
+          </a:prstGeom>
+          <a:solidFill>
+            <a:srgbClr val="1D4ED8"/>
+          </a:solidFill>
+          <a:ln>
+            <a:solidFill>
+              <a:srgbClr val="1D4ED8"/>
+            </a:solidFill>
+          </a:ln>
+        </p:spPr>
+      </p:sp>
+      <p:sp>
+        <p:nvSpPr>
+          <p:cNvPr name="TextBox 6" id="6"/>
+          <p:cNvSpPr txBox="true"/>
+          <p:nvPr/>
+        </p:nvSpPr>
+        <p:spPr>
+          <a:xfrm>
+            <a:off x="304800" y="6451600"/>
+            <a:ext cx="11582400" cy="279400"/>
+          </a:xfrm>
+          <a:prstGeom prst="rect">
+            <a:avLst/>
+          </a:prstGeom>
+          <a:solidFill>
+            <a:srgbClr val="FFFFFF">
+              <a:alpha val="0"/>
+            </a:srgbClr>
+          </a:solidFill>
+        </p:spPr>
+        <p:txBody>
+          <a:bodyPr anchor="t" rtlCol="false"/>
+          <a:lstStyle/>
+          <a:p>
+            <a:pPr algn="l">
+              <a:defRPr/>
+            </a:pPr>
+            <a:r>
+              <a:rPr lang="zh-CN"/>
+              <a:t/>
+            </a:r>
+            <a:endParaRPr lang="en-US" sz="1100"/>
+          </a:p>
+          <a:p>
+            <a:pPr algn="l"/>
+            <a:r>
+              <a:rPr lang="en-US" sz="1080">
+                <a:solidFill>
+                  <a:srgbClr val="6B7280"/>
+                </a:solidFill>
+                <a:latin typeface="Source Sans 3"/>
+              </a:rPr>
+              <a:t>Visual Document OS</a:t>
+            </a:r>
+            <a:r>
+              <a:rPr lang="en-US" sz="1000">
+                <a:solidFill>
+                  <a:srgbClr val="6B7280"/>
+                </a:solidFill>
+                <a:latin typeface="Source Sans 3"/>
+              </a:rPr>
+              <a:t>    #9/9</a:t>
+            </a:r>
+          </a:p>
+        </p:txBody>
+      </p:sp>
+      <p:sp>
+        <p:nvSpPr>
+          <p:cNvPr name="TextBox 7" id="7"/>
           <p:cNvSpPr txBox="true"/>
           <p:nvPr/>
         </p:nvSpPr>
